--- a/DINOv3_決策簡報.pptx
+++ b/DINOv3_決策簡報.pptx
@@ -12,6 +12,7 @@
     <p:sldId id="260" r:id="rId11"/>
     <p:sldId id="261" r:id="rId12"/>
     <p:sldId id="262" r:id="rId13"/>
+    <p:sldId id="263" r:id="rId14"/>
   </p:sldIdLst>
   <p:sldSz cx="12191695" cy="6858000" type="screen4x3"/>
   <p:notesSz cx="6858000" cy="9144000"/>
@@ -9182,6 +9183,1749 @@
                 <a:ea typeface="Microsoft JhengHei"/>
               </a:rPr>
               <a:t>內部  room_classifier.py 授權宣告 · Readme.md v2.33 已知待辦 · FloorTraining.md §3 重訓鐵律</a:t>
+            </a:r>
+          </a:p>
+        </p:txBody>
+      </p:sp>
+    </p:spTree>
+  </p:cSld>
+  <p:clrMapOvr>
+    <a:masterClrMapping/>
+  </p:clrMapOvr>
+</p:sld>
+</file>
+
+<file path=ppt/slides/slide8.xml><?xml version="1.0" encoding="utf-8"?>
+<p:sld xmlns:a="http://schemas.openxmlformats.org/drawingml/2006/main" xmlns:p="http://schemas.openxmlformats.org/presentationml/2006/main" xmlns:r="http://schemas.openxmlformats.org/officeDocument/2006/relationships">
+  <p:cSld>
+    <p:spTree>
+      <p:nvGrpSpPr>
+        <p:cNvPr id="1" name=""/>
+        <p:cNvGrpSpPr/>
+        <p:nvPr/>
+      </p:nvGrpSpPr>
+      <p:grpSpPr/>
+      <p:sp>
+        <p:nvSpPr>
+          <p:cNvPr id="2" name="Rectangle 1"/>
+          <p:cNvSpPr/>
+          <p:nvPr/>
+        </p:nvSpPr>
+        <p:spPr>
+          <a:xfrm>
+            <a:off x="0" y="0"/>
+            <a:ext cx="12191695" cy="6858000"/>
+          </a:xfrm>
+          <a:prstGeom prst="rect">
+            <a:avLst/>
+          </a:prstGeom>
+          <a:solidFill>
+            <a:srgbClr val="FFFFFF"/>
+          </a:solidFill>
+          <a:ln>
+            <a:noFill/>
+          </a:ln>
+          <a:effectLst/>
+        </p:spPr>
+        <p:style>
+          <a:lnRef idx="1">
+            <a:schemeClr val="accent1"/>
+          </a:lnRef>
+          <a:fillRef idx="3">
+            <a:schemeClr val="accent1"/>
+          </a:fillRef>
+          <a:effectRef idx="2">
+            <a:schemeClr val="accent1"/>
+          </a:effectRef>
+          <a:fontRef idx="minor">
+            <a:schemeClr val="lt1"/>
+          </a:fontRef>
+        </p:style>
+        <p:txBody>
+          <a:bodyPr rtlCol="0" anchor="ctr"/>
+          <a:lstStyle/>
+          <a:p>
+            <a:pPr algn="ctr"/>
+          </a:p>
+        </p:txBody>
+      </p:sp>
+      <p:sp>
+        <p:nvSpPr>
+          <p:cNvPr id="3" name="Rectangle 2"/>
+          <p:cNvSpPr/>
+          <p:nvPr/>
+        </p:nvSpPr>
+        <p:spPr>
+          <a:xfrm>
+            <a:off x="0" y="0"/>
+            <a:ext cx="12191695" cy="91440"/>
+          </a:xfrm>
+          <a:prstGeom prst="rect">
+            <a:avLst/>
+          </a:prstGeom>
+          <a:solidFill>
+            <a:srgbClr val="2C6B9C"/>
+          </a:solidFill>
+          <a:ln>
+            <a:noFill/>
+          </a:ln>
+          <a:effectLst/>
+        </p:spPr>
+        <p:style>
+          <a:lnRef idx="1">
+            <a:schemeClr val="accent1"/>
+          </a:lnRef>
+          <a:fillRef idx="3">
+            <a:schemeClr val="accent1"/>
+          </a:fillRef>
+          <a:effectRef idx="2">
+            <a:schemeClr val="accent1"/>
+          </a:effectRef>
+          <a:fontRef idx="minor">
+            <a:schemeClr val="lt1"/>
+          </a:fontRef>
+        </p:style>
+        <p:txBody>
+          <a:bodyPr rtlCol="0" anchor="ctr"/>
+          <a:lstStyle/>
+          <a:p>
+            <a:pPr algn="ctr"/>
+          </a:p>
+        </p:txBody>
+      </p:sp>
+      <p:sp>
+        <p:nvSpPr>
+          <p:cNvPr id="4" name="TextBox 3"/>
+          <p:cNvSpPr txBox="1"/>
+          <p:nvPr/>
+        </p:nvSpPr>
+        <p:spPr>
+          <a:xfrm>
+            <a:off x="731520" y="457200"/>
+            <a:ext cx="10058400" cy="274320"/>
+          </a:xfrm>
+          <a:prstGeom prst="rect">
+            <a:avLst/>
+          </a:prstGeom>
+          <a:noFill/>
+        </p:spPr>
+        <p:txBody>
+          <a:bodyPr wrap="square" anchor="t" lIns="0" rIns="0" tIns="0" bIns="0">
+            <a:spAutoFit/>
+          </a:bodyPr>
+          <a:lstStyle/>
+          <a:p>
+            <a:pPr algn="l">
+              <a:lnSpc>
+                <a:spcPct val="100000"/>
+              </a:lnSpc>
+            </a:pPr>
+            <a:r>
+              <a:rPr sz="1200" b="1">
+                <a:solidFill>
+                  <a:srgbClr val="2C6B9C"/>
+                </a:solidFill>
+                <a:latin typeface="Microsoft JhengHei"/>
+              </a:rPr>
+              <a:t>進度更新  ·  兩道關卡已解</a:t>
+            </a:r>
+          </a:p>
+        </p:txBody>
+      </p:sp>
+      <p:sp>
+        <p:nvSpPr>
+          <p:cNvPr id="5" name="TextBox 4"/>
+          <p:cNvSpPr txBox="1"/>
+          <p:nvPr/>
+        </p:nvSpPr>
+        <p:spPr>
+          <a:xfrm>
+            <a:off x="731520" y="777240"/>
+            <a:ext cx="10789920" cy="548640"/>
+          </a:xfrm>
+          <a:prstGeom prst="rect">
+            <a:avLst/>
+          </a:prstGeom>
+          <a:noFill/>
+        </p:spPr>
+        <p:txBody>
+          <a:bodyPr wrap="square" anchor="t" lIns="0" rIns="0" tIns="0" bIns="0">
+            <a:spAutoFit/>
+          </a:bodyPr>
+          <a:lstStyle/>
+          <a:p>
+            <a:pPr algn="l">
+              <a:lnSpc>
+                <a:spcPct val="100000"/>
+              </a:lnSpc>
+            </a:pPr>
+            <a:r>
+              <a:rPr sz="2200" b="1">
+                <a:solidFill>
+                  <a:srgbClr val="171A1F"/>
+                </a:solidFill>
+                <a:latin typeface="Microsoft JhengHei"/>
+              </a:rPr>
+              <a:t>更新 · 2026-08-12：授權核准通過，DINOv3 探針數字回填</a:t>
+            </a:r>
+          </a:p>
+        </p:txBody>
+      </p:sp>
+      <p:sp>
+        <p:nvSpPr>
+          <p:cNvPr id="6" name="Rounded Rectangle 5"/>
+          <p:cNvSpPr/>
+          <p:nvPr/>
+        </p:nvSpPr>
+        <p:spPr>
+          <a:xfrm>
+            <a:off x="731520" y="1600200"/>
+            <a:ext cx="10789920" cy="868680"/>
+          </a:xfrm>
+          <a:prstGeom prst="roundRect">
+            <a:avLst/>
+          </a:prstGeom>
+          <a:solidFill>
+            <a:srgbClr val="E7F2EF"/>
+          </a:solidFill>
+          <a:ln w="12700">
+            <a:solidFill>
+              <a:srgbClr val="2C7A68"/>
+            </a:solidFill>
+          </a:ln>
+          <a:effectLst/>
+        </p:spPr>
+        <p:style>
+          <a:lnRef idx="1">
+            <a:schemeClr val="accent1"/>
+          </a:lnRef>
+          <a:fillRef idx="3">
+            <a:schemeClr val="accent1"/>
+          </a:fillRef>
+          <a:effectRef idx="2">
+            <a:schemeClr val="accent1"/>
+          </a:effectRef>
+          <a:fontRef idx="minor">
+            <a:schemeClr val="lt1"/>
+          </a:fontRef>
+        </p:style>
+        <p:txBody>
+          <a:bodyPr rtlCol="0" anchor="ctr"/>
+          <a:lstStyle/>
+          <a:p>
+            <a:pPr algn="ctr"/>
+          </a:p>
+        </p:txBody>
+      </p:sp>
+      <p:sp>
+        <p:nvSpPr>
+          <p:cNvPr id="7" name="Rectangle 6"/>
+          <p:cNvSpPr/>
+          <p:nvPr/>
+        </p:nvSpPr>
+        <p:spPr>
+          <a:xfrm>
+            <a:off x="731520" y="1600200"/>
+            <a:ext cx="109728" cy="868680"/>
+          </a:xfrm>
+          <a:prstGeom prst="rect">
+            <a:avLst/>
+          </a:prstGeom>
+          <a:solidFill>
+            <a:srgbClr val="2C7A68"/>
+          </a:solidFill>
+          <a:ln>
+            <a:noFill/>
+          </a:ln>
+          <a:effectLst/>
+        </p:spPr>
+        <p:style>
+          <a:lnRef idx="1">
+            <a:schemeClr val="accent1"/>
+          </a:lnRef>
+          <a:fillRef idx="3">
+            <a:schemeClr val="accent1"/>
+          </a:fillRef>
+          <a:effectRef idx="2">
+            <a:schemeClr val="accent1"/>
+          </a:effectRef>
+          <a:fontRef idx="minor">
+            <a:schemeClr val="lt1"/>
+          </a:fontRef>
+        </p:style>
+        <p:txBody>
+          <a:bodyPr rtlCol="0" anchor="ctr"/>
+          <a:lstStyle/>
+          <a:p>
+            <a:pPr algn="ctr"/>
+          </a:p>
+        </p:txBody>
+      </p:sp>
+      <p:sp>
+        <p:nvSpPr>
+          <p:cNvPr id="8" name="TextBox 7"/>
+          <p:cNvSpPr txBox="1"/>
+          <p:nvPr/>
+        </p:nvSpPr>
+        <p:spPr>
+          <a:xfrm>
+            <a:off x="1051560" y="1755648"/>
+            <a:ext cx="1828800" cy="365760"/>
+          </a:xfrm>
+          <a:prstGeom prst="rect">
+            <a:avLst/>
+          </a:prstGeom>
+          <a:noFill/>
+        </p:spPr>
+        <p:txBody>
+          <a:bodyPr wrap="square" anchor="t" lIns="0" rIns="0" tIns="0" bIns="0">
+            <a:spAutoFit/>
+          </a:bodyPr>
+          <a:lstStyle/>
+          <a:p>
+            <a:pPr algn="l">
+              <a:lnSpc>
+                <a:spcPct val="100000"/>
+              </a:lnSpc>
+            </a:pPr>
+            <a:r>
+              <a:rPr sz="1250" b="1">
+                <a:solidFill>
+                  <a:srgbClr val="2C7A68"/>
+                </a:solidFill>
+                <a:latin typeface="Microsoft JhengHei"/>
+              </a:rPr>
+              <a:t>門禁已核准</a:t>
+            </a:r>
+          </a:p>
+        </p:txBody>
+      </p:sp>
+      <p:sp>
+        <p:nvSpPr>
+          <p:cNvPr id="9" name="TextBox 8"/>
+          <p:cNvSpPr txBox="1"/>
+          <p:nvPr/>
+        </p:nvSpPr>
+        <p:spPr>
+          <a:xfrm>
+            <a:off x="1051560" y="2121408"/>
+            <a:ext cx="10241280" cy="274320"/>
+          </a:xfrm>
+          <a:prstGeom prst="rect">
+            <a:avLst/>
+          </a:prstGeom>
+          <a:noFill/>
+        </p:spPr>
+        <p:txBody>
+          <a:bodyPr wrap="square" anchor="t" lIns="0" rIns="0" tIns="0" bIns="0">
+            <a:spAutoFit/>
+          </a:bodyPr>
+          <a:lstStyle/>
+          <a:p>
+            <a:pPr algn="l">
+              <a:lnSpc>
+                <a:spcPct val="100000"/>
+              </a:lnSpc>
+            </a:pPr>
+            <a:r>
+              <a:rPr sz="1250" b="0">
+                <a:solidFill>
+                  <a:srgbClr val="5C636B"/>
+                </a:solidFill>
+                <a:latin typeface="Microsoft JhengHei"/>
+              </a:rPr>
+              <a:t>HF gated access granted（帳號 CodyCH，2026-08-12）· token canReadGatedRepos=true · gated config.json 由 401→</a:t>
+            </a:r>
+            <a:r>
+              <a:rPr sz="1250" b="1">
+                <a:solidFill>
+                  <a:srgbClr val="2C7A68"/>
+                </a:solidFill>
+                <a:latin typeface="Microsoft JhengHei"/>
+              </a:rPr>
+              <a:t>HTTP 200</a:t>
+            </a:r>
+            <a:r>
+              <a:rPr sz="1250" b="0">
+                <a:solidFill>
+                  <a:srgbClr val="5C636B"/>
+                </a:solidFill>
+                <a:latin typeface="Microsoft JhengHei"/>
+              </a:rPr>
+              <a:t>，權重實際下載成功。</a:t>
+            </a:r>
+          </a:p>
+        </p:txBody>
+      </p:sp>
+      <p:sp>
+        <p:nvSpPr>
+          <p:cNvPr id="10" name="Rectangle 9"/>
+          <p:cNvSpPr/>
+          <p:nvPr/>
+        </p:nvSpPr>
+        <p:spPr>
+          <a:xfrm>
+            <a:off x="731520" y="2743200"/>
+            <a:ext cx="3291840" cy="502920"/>
+          </a:xfrm>
+          <a:prstGeom prst="rect">
+            <a:avLst/>
+          </a:prstGeom>
+          <a:solidFill>
+            <a:srgbClr val="2C6B9C"/>
+          </a:solidFill>
+          <a:ln w="12700">
+            <a:solidFill>
+              <a:srgbClr val="D8DDE4"/>
+            </a:solidFill>
+          </a:ln>
+          <a:effectLst/>
+        </p:spPr>
+        <p:style>
+          <a:lnRef idx="1">
+            <a:schemeClr val="accent1"/>
+          </a:lnRef>
+          <a:fillRef idx="3">
+            <a:schemeClr val="accent1"/>
+          </a:fillRef>
+          <a:effectRef idx="2">
+            <a:schemeClr val="accent1"/>
+          </a:effectRef>
+          <a:fontRef idx="minor">
+            <a:schemeClr val="lt1"/>
+          </a:fontRef>
+        </p:style>
+        <p:txBody>
+          <a:bodyPr rtlCol="0" anchor="ctr"/>
+          <a:lstStyle/>
+          <a:p>
+            <a:pPr algn="ctr"/>
+          </a:p>
+        </p:txBody>
+      </p:sp>
+      <p:sp>
+        <p:nvSpPr>
+          <p:cNvPr id="11" name="TextBox 10"/>
+          <p:cNvSpPr txBox="1"/>
+          <p:nvPr/>
+        </p:nvSpPr>
+        <p:spPr>
+          <a:xfrm>
+            <a:off x="914400" y="2743200"/>
+            <a:ext cx="3017520" cy="502920"/>
+          </a:xfrm>
+          <a:prstGeom prst="rect">
+            <a:avLst/>
+          </a:prstGeom>
+          <a:noFill/>
+        </p:spPr>
+        <p:txBody>
+          <a:bodyPr wrap="square" anchor="ctr" lIns="0" rIns="0" tIns="0" bIns="0">
+            <a:spAutoFit/>
+          </a:bodyPr>
+          <a:lstStyle/>
+          <a:p>
+            <a:pPr algn="l">
+              <a:lnSpc>
+                <a:spcPct val="100000"/>
+              </a:lnSpc>
+            </a:pPr>
+            <a:r>
+              <a:rPr sz="1300" b="1">
+                <a:solidFill>
+                  <a:srgbClr val="FFFFFF"/>
+                </a:solidFill>
+                <a:latin typeface="Microsoft JhengHei"/>
+              </a:rPr>
+              <a:t>特徵可分性量尺（LOO，零重訓）</a:t>
+            </a:r>
+          </a:p>
+        </p:txBody>
+      </p:sp>
+      <p:sp>
+        <p:nvSpPr>
+          <p:cNvPr id="12" name="Rectangle 11"/>
+          <p:cNvSpPr/>
+          <p:nvPr/>
+        </p:nvSpPr>
+        <p:spPr>
+          <a:xfrm>
+            <a:off x="4023360" y="2743200"/>
+            <a:ext cx="2468880" cy="502920"/>
+          </a:xfrm>
+          <a:prstGeom prst="rect">
+            <a:avLst/>
+          </a:prstGeom>
+          <a:solidFill>
+            <a:srgbClr val="2C6B9C"/>
+          </a:solidFill>
+          <a:ln w="12700">
+            <a:solidFill>
+              <a:srgbClr val="D8DDE4"/>
+            </a:solidFill>
+          </a:ln>
+          <a:effectLst/>
+        </p:spPr>
+        <p:style>
+          <a:lnRef idx="1">
+            <a:schemeClr val="accent1"/>
+          </a:lnRef>
+          <a:fillRef idx="3">
+            <a:schemeClr val="accent1"/>
+          </a:fillRef>
+          <a:effectRef idx="2">
+            <a:schemeClr val="accent1"/>
+          </a:effectRef>
+          <a:fontRef idx="minor">
+            <a:schemeClr val="lt1"/>
+          </a:fontRef>
+        </p:style>
+        <p:txBody>
+          <a:bodyPr rtlCol="0" anchor="ctr"/>
+          <a:lstStyle/>
+          <a:p>
+            <a:pPr algn="ctr"/>
+          </a:p>
+        </p:txBody>
+      </p:sp>
+      <p:sp>
+        <p:nvSpPr>
+          <p:cNvPr id="13" name="TextBox 12"/>
+          <p:cNvSpPr txBox="1"/>
+          <p:nvPr/>
+        </p:nvSpPr>
+        <p:spPr>
+          <a:xfrm>
+            <a:off x="4206240" y="2743200"/>
+            <a:ext cx="2194560" cy="502920"/>
+          </a:xfrm>
+          <a:prstGeom prst="rect">
+            <a:avLst/>
+          </a:prstGeom>
+          <a:noFill/>
+        </p:spPr>
+        <p:txBody>
+          <a:bodyPr wrap="square" anchor="ctr" lIns="0" rIns="0" tIns="0" bIns="0">
+            <a:spAutoFit/>
+          </a:bodyPr>
+          <a:lstStyle/>
+          <a:p>
+            <a:pPr algn="ctr">
+              <a:lnSpc>
+                <a:spcPct val="100000"/>
+              </a:lnSpc>
+            </a:pPr>
+            <a:r>
+              <a:rPr sz="1300" b="1">
+                <a:solidFill>
+                  <a:srgbClr val="FFFFFF"/>
+                </a:solidFill>
+                <a:latin typeface="Microsoft JhengHei"/>
+              </a:rPr>
+              <a:t>DINOv2 基準</a:t>
+            </a:r>
+          </a:p>
+        </p:txBody>
+      </p:sp>
+      <p:sp>
+        <p:nvSpPr>
+          <p:cNvPr id="14" name="Rectangle 13"/>
+          <p:cNvSpPr/>
+          <p:nvPr/>
+        </p:nvSpPr>
+        <p:spPr>
+          <a:xfrm>
+            <a:off x="6492240" y="2743200"/>
+            <a:ext cx="2468880" cy="502920"/>
+          </a:xfrm>
+          <a:prstGeom prst="rect">
+            <a:avLst/>
+          </a:prstGeom>
+          <a:solidFill>
+            <a:srgbClr val="2C6B9C"/>
+          </a:solidFill>
+          <a:ln w="12700">
+            <a:solidFill>
+              <a:srgbClr val="D8DDE4"/>
+            </a:solidFill>
+          </a:ln>
+          <a:effectLst/>
+        </p:spPr>
+        <p:style>
+          <a:lnRef idx="1">
+            <a:schemeClr val="accent1"/>
+          </a:lnRef>
+          <a:fillRef idx="3">
+            <a:schemeClr val="accent1"/>
+          </a:fillRef>
+          <a:effectRef idx="2">
+            <a:schemeClr val="accent1"/>
+          </a:effectRef>
+          <a:fontRef idx="minor">
+            <a:schemeClr val="lt1"/>
+          </a:fontRef>
+        </p:style>
+        <p:txBody>
+          <a:bodyPr rtlCol="0" anchor="ctr"/>
+          <a:lstStyle/>
+          <a:p>
+            <a:pPr algn="ctr"/>
+          </a:p>
+        </p:txBody>
+      </p:sp>
+      <p:sp>
+        <p:nvSpPr>
+          <p:cNvPr id="15" name="TextBox 14"/>
+          <p:cNvSpPr txBox="1"/>
+          <p:nvPr/>
+        </p:nvSpPr>
+        <p:spPr>
+          <a:xfrm>
+            <a:off x="6675120" y="2743200"/>
+            <a:ext cx="2194560" cy="502920"/>
+          </a:xfrm>
+          <a:prstGeom prst="rect">
+            <a:avLst/>
+          </a:prstGeom>
+          <a:noFill/>
+        </p:spPr>
+        <p:txBody>
+          <a:bodyPr wrap="square" anchor="ctr" lIns="0" rIns="0" tIns="0" bIns="0">
+            <a:spAutoFit/>
+          </a:bodyPr>
+          <a:lstStyle/>
+          <a:p>
+            <a:pPr algn="ctr">
+              <a:lnSpc>
+                <a:spcPct val="100000"/>
+              </a:lnSpc>
+            </a:pPr>
+            <a:r>
+              <a:rPr sz="1300" b="1">
+                <a:solidFill>
+                  <a:srgbClr val="FFFFFF"/>
+                </a:solidFill>
+                <a:latin typeface="Microsoft JhengHei"/>
+              </a:rPr>
+              <a:t>DINOv3</a:t>
+            </a:r>
+          </a:p>
+        </p:txBody>
+      </p:sp>
+      <p:sp>
+        <p:nvSpPr>
+          <p:cNvPr id="16" name="Rectangle 15"/>
+          <p:cNvSpPr/>
+          <p:nvPr/>
+        </p:nvSpPr>
+        <p:spPr>
+          <a:xfrm>
+            <a:off x="8961120" y="2743200"/>
+            <a:ext cx="2560320" cy="502920"/>
+          </a:xfrm>
+          <a:prstGeom prst="rect">
+            <a:avLst/>
+          </a:prstGeom>
+          <a:solidFill>
+            <a:srgbClr val="2C6B9C"/>
+          </a:solidFill>
+          <a:ln w="12700">
+            <a:solidFill>
+              <a:srgbClr val="D8DDE4"/>
+            </a:solidFill>
+          </a:ln>
+          <a:effectLst/>
+        </p:spPr>
+        <p:style>
+          <a:lnRef idx="1">
+            <a:schemeClr val="accent1"/>
+          </a:lnRef>
+          <a:fillRef idx="3">
+            <a:schemeClr val="accent1"/>
+          </a:fillRef>
+          <a:effectRef idx="2">
+            <a:schemeClr val="accent1"/>
+          </a:effectRef>
+          <a:fontRef idx="minor">
+            <a:schemeClr val="lt1"/>
+          </a:fontRef>
+        </p:style>
+        <p:txBody>
+          <a:bodyPr rtlCol="0" anchor="ctr"/>
+          <a:lstStyle/>
+          <a:p>
+            <a:pPr algn="ctr"/>
+          </a:p>
+        </p:txBody>
+      </p:sp>
+      <p:sp>
+        <p:nvSpPr>
+          <p:cNvPr id="17" name="TextBox 16"/>
+          <p:cNvSpPr txBox="1"/>
+          <p:nvPr/>
+        </p:nvSpPr>
+        <p:spPr>
+          <a:xfrm>
+            <a:off x="9144000" y="2743200"/>
+            <a:ext cx="2286000" cy="502920"/>
+          </a:xfrm>
+          <a:prstGeom prst="rect">
+            <a:avLst/>
+          </a:prstGeom>
+          <a:noFill/>
+        </p:spPr>
+        <p:txBody>
+          <a:bodyPr wrap="square" anchor="ctr" lIns="0" rIns="0" tIns="0" bIns="0">
+            <a:spAutoFit/>
+          </a:bodyPr>
+          <a:lstStyle/>
+          <a:p>
+            <a:pPr algn="ctr">
+              <a:lnSpc>
+                <a:spcPct val="100000"/>
+              </a:lnSpc>
+            </a:pPr>
+            <a:r>
+              <a:rPr sz="1300" b="1">
+                <a:solidFill>
+                  <a:srgbClr val="FFFFFF"/>
+                </a:solidFill>
+                <a:latin typeface="Microsoft JhengHei"/>
+              </a:rPr>
+              <a:t>Δ</a:t>
+            </a:r>
+          </a:p>
+        </p:txBody>
+      </p:sp>
+      <p:sp>
+        <p:nvSpPr>
+          <p:cNvPr id="18" name="Rectangle 17"/>
+          <p:cNvSpPr/>
+          <p:nvPr/>
+        </p:nvSpPr>
+        <p:spPr>
+          <a:xfrm>
+            <a:off x="731520" y="3246120"/>
+            <a:ext cx="3291840" cy="502920"/>
+          </a:xfrm>
+          <a:prstGeom prst="rect">
+            <a:avLst/>
+          </a:prstGeom>
+          <a:solidFill>
+            <a:srgbClr val="FFFFFF"/>
+          </a:solidFill>
+          <a:ln w="12700">
+            <a:solidFill>
+              <a:srgbClr val="D8DDE4"/>
+            </a:solidFill>
+          </a:ln>
+          <a:effectLst/>
+        </p:spPr>
+        <p:style>
+          <a:lnRef idx="1">
+            <a:schemeClr val="accent1"/>
+          </a:lnRef>
+          <a:fillRef idx="3">
+            <a:schemeClr val="accent1"/>
+          </a:fillRef>
+          <a:effectRef idx="2">
+            <a:schemeClr val="accent1"/>
+          </a:effectRef>
+          <a:fontRef idx="minor">
+            <a:schemeClr val="lt1"/>
+          </a:fontRef>
+        </p:style>
+        <p:txBody>
+          <a:bodyPr rtlCol="0" anchor="ctr"/>
+          <a:lstStyle/>
+          <a:p>
+            <a:pPr algn="ctr"/>
+          </a:p>
+        </p:txBody>
+      </p:sp>
+      <p:sp>
+        <p:nvSpPr>
+          <p:cNvPr id="19" name="TextBox 18"/>
+          <p:cNvSpPr txBox="1"/>
+          <p:nvPr/>
+        </p:nvSpPr>
+        <p:spPr>
+          <a:xfrm>
+            <a:off x="914400" y="3246120"/>
+            <a:ext cx="3017520" cy="502920"/>
+          </a:xfrm>
+          <a:prstGeom prst="rect">
+            <a:avLst/>
+          </a:prstGeom>
+          <a:noFill/>
+        </p:spPr>
+        <p:txBody>
+          <a:bodyPr wrap="square" anchor="ctr" lIns="0" rIns="0" tIns="0" bIns="0">
+            <a:spAutoFit/>
+          </a:bodyPr>
+          <a:lstStyle/>
+          <a:p>
+            <a:pPr algn="l">
+              <a:lnSpc>
+                <a:spcPct val="100000"/>
+              </a:lnSpc>
+            </a:pPr>
+            <a:r>
+              <a:rPr sz="1400" b="0">
+                <a:solidFill>
+                  <a:srgbClr val="171A1F"/>
+                </a:solidFill>
+                <a:latin typeface="Microsoft JhengHei"/>
+              </a:rPr>
+              <a:t>最近質心 NC</a:t>
+            </a:r>
+          </a:p>
+        </p:txBody>
+      </p:sp>
+      <p:sp>
+        <p:nvSpPr>
+          <p:cNvPr id="20" name="Rectangle 19"/>
+          <p:cNvSpPr/>
+          <p:nvPr/>
+        </p:nvSpPr>
+        <p:spPr>
+          <a:xfrm>
+            <a:off x="4023360" y="3246120"/>
+            <a:ext cx="2468880" cy="502920"/>
+          </a:xfrm>
+          <a:prstGeom prst="rect">
+            <a:avLst/>
+          </a:prstGeom>
+          <a:solidFill>
+            <a:srgbClr val="FFFFFF"/>
+          </a:solidFill>
+          <a:ln w="12700">
+            <a:solidFill>
+              <a:srgbClr val="D8DDE4"/>
+            </a:solidFill>
+          </a:ln>
+          <a:effectLst/>
+        </p:spPr>
+        <p:style>
+          <a:lnRef idx="1">
+            <a:schemeClr val="accent1"/>
+          </a:lnRef>
+          <a:fillRef idx="3">
+            <a:schemeClr val="accent1"/>
+          </a:fillRef>
+          <a:effectRef idx="2">
+            <a:schemeClr val="accent1"/>
+          </a:effectRef>
+          <a:fontRef idx="minor">
+            <a:schemeClr val="lt1"/>
+          </a:fontRef>
+        </p:style>
+        <p:txBody>
+          <a:bodyPr rtlCol="0" anchor="ctr"/>
+          <a:lstStyle/>
+          <a:p>
+            <a:pPr algn="ctr"/>
+          </a:p>
+        </p:txBody>
+      </p:sp>
+      <p:sp>
+        <p:nvSpPr>
+          <p:cNvPr id="21" name="TextBox 20"/>
+          <p:cNvSpPr txBox="1"/>
+          <p:nvPr/>
+        </p:nvSpPr>
+        <p:spPr>
+          <a:xfrm>
+            <a:off x="4023360" y="3246120"/>
+            <a:ext cx="2468880" cy="502920"/>
+          </a:xfrm>
+          <a:prstGeom prst="rect">
+            <a:avLst/>
+          </a:prstGeom>
+          <a:noFill/>
+        </p:spPr>
+        <p:txBody>
+          <a:bodyPr wrap="square" anchor="ctr" lIns="0" rIns="0" tIns="0" bIns="0">
+            <a:spAutoFit/>
+          </a:bodyPr>
+          <a:lstStyle/>
+          <a:p>
+            <a:pPr algn="ctr">
+              <a:lnSpc>
+                <a:spcPct val="100000"/>
+              </a:lnSpc>
+            </a:pPr>
+            <a:r>
+              <a:rPr sz="1450" b="0">
+                <a:solidFill>
+                  <a:srgbClr val="5C636B"/>
+                </a:solidFill>
+                <a:latin typeface="Microsoft JhengHei"/>
+              </a:rPr>
+              <a:t>0.536</a:t>
+            </a:r>
+          </a:p>
+        </p:txBody>
+      </p:sp>
+      <p:sp>
+        <p:nvSpPr>
+          <p:cNvPr id="22" name="Rectangle 21"/>
+          <p:cNvSpPr/>
+          <p:nvPr/>
+        </p:nvSpPr>
+        <p:spPr>
+          <a:xfrm>
+            <a:off x="6492240" y="3246120"/>
+            <a:ext cx="2468880" cy="502920"/>
+          </a:xfrm>
+          <a:prstGeom prst="rect">
+            <a:avLst/>
+          </a:prstGeom>
+          <a:solidFill>
+            <a:srgbClr val="FFFFFF"/>
+          </a:solidFill>
+          <a:ln w="12700">
+            <a:solidFill>
+              <a:srgbClr val="D8DDE4"/>
+            </a:solidFill>
+          </a:ln>
+          <a:effectLst/>
+        </p:spPr>
+        <p:style>
+          <a:lnRef idx="1">
+            <a:schemeClr val="accent1"/>
+          </a:lnRef>
+          <a:fillRef idx="3">
+            <a:schemeClr val="accent1"/>
+          </a:fillRef>
+          <a:effectRef idx="2">
+            <a:schemeClr val="accent1"/>
+          </a:effectRef>
+          <a:fontRef idx="minor">
+            <a:schemeClr val="lt1"/>
+          </a:fontRef>
+        </p:style>
+        <p:txBody>
+          <a:bodyPr rtlCol="0" anchor="ctr"/>
+          <a:lstStyle/>
+          <a:p>
+            <a:pPr algn="ctr"/>
+          </a:p>
+        </p:txBody>
+      </p:sp>
+      <p:sp>
+        <p:nvSpPr>
+          <p:cNvPr id="23" name="TextBox 22"/>
+          <p:cNvSpPr txBox="1"/>
+          <p:nvPr/>
+        </p:nvSpPr>
+        <p:spPr>
+          <a:xfrm>
+            <a:off x="6492240" y="3246120"/>
+            <a:ext cx="2468880" cy="502920"/>
+          </a:xfrm>
+          <a:prstGeom prst="rect">
+            <a:avLst/>
+          </a:prstGeom>
+          <a:noFill/>
+        </p:spPr>
+        <p:txBody>
+          <a:bodyPr wrap="square" anchor="ctr" lIns="0" rIns="0" tIns="0" bIns="0">
+            <a:spAutoFit/>
+          </a:bodyPr>
+          <a:lstStyle/>
+          <a:p>
+            <a:pPr algn="ctr">
+              <a:lnSpc>
+                <a:spcPct val="100000"/>
+              </a:lnSpc>
+            </a:pPr>
+            <a:r>
+              <a:rPr sz="1450" b="1">
+                <a:solidFill>
+                  <a:srgbClr val="2C6B9C"/>
+                </a:solidFill>
+                <a:latin typeface="Microsoft JhengHei"/>
+              </a:rPr>
+              <a:t>0.573</a:t>
+            </a:r>
+          </a:p>
+        </p:txBody>
+      </p:sp>
+      <p:sp>
+        <p:nvSpPr>
+          <p:cNvPr id="24" name="Rectangle 23"/>
+          <p:cNvSpPr/>
+          <p:nvPr/>
+        </p:nvSpPr>
+        <p:spPr>
+          <a:xfrm>
+            <a:off x="8961120" y="3246120"/>
+            <a:ext cx="2560320" cy="502920"/>
+          </a:xfrm>
+          <a:prstGeom prst="rect">
+            <a:avLst/>
+          </a:prstGeom>
+          <a:solidFill>
+            <a:srgbClr val="FFFFFF"/>
+          </a:solidFill>
+          <a:ln w="12700">
+            <a:solidFill>
+              <a:srgbClr val="D8DDE4"/>
+            </a:solidFill>
+          </a:ln>
+          <a:effectLst/>
+        </p:spPr>
+        <p:style>
+          <a:lnRef idx="1">
+            <a:schemeClr val="accent1"/>
+          </a:lnRef>
+          <a:fillRef idx="3">
+            <a:schemeClr val="accent1"/>
+          </a:fillRef>
+          <a:effectRef idx="2">
+            <a:schemeClr val="accent1"/>
+          </a:effectRef>
+          <a:fontRef idx="minor">
+            <a:schemeClr val="lt1"/>
+          </a:fontRef>
+        </p:style>
+        <p:txBody>
+          <a:bodyPr rtlCol="0" anchor="ctr"/>
+          <a:lstStyle/>
+          <a:p>
+            <a:pPr algn="ctr"/>
+          </a:p>
+        </p:txBody>
+      </p:sp>
+      <p:sp>
+        <p:nvSpPr>
+          <p:cNvPr id="25" name="TextBox 24"/>
+          <p:cNvSpPr txBox="1"/>
+          <p:nvPr/>
+        </p:nvSpPr>
+        <p:spPr>
+          <a:xfrm>
+            <a:off x="8961120" y="3246120"/>
+            <a:ext cx="2560320" cy="502920"/>
+          </a:xfrm>
+          <a:prstGeom prst="rect">
+            <a:avLst/>
+          </a:prstGeom>
+          <a:noFill/>
+        </p:spPr>
+        <p:txBody>
+          <a:bodyPr wrap="square" anchor="ctr" lIns="0" rIns="0" tIns="0" bIns="0">
+            <a:spAutoFit/>
+          </a:bodyPr>
+          <a:lstStyle/>
+          <a:p>
+            <a:pPr algn="ctr">
+              <a:lnSpc>
+                <a:spcPct val="100000"/>
+              </a:lnSpc>
+            </a:pPr>
+            <a:r>
+              <a:rPr sz="1450" b="1">
+                <a:solidFill>
+                  <a:srgbClr val="2C7A68"/>
+                </a:solidFill>
+                <a:latin typeface="Microsoft JhengHei"/>
+              </a:rPr>
+              <a:t>+0.037</a:t>
+            </a:r>
+          </a:p>
+        </p:txBody>
+      </p:sp>
+      <p:sp>
+        <p:nvSpPr>
+          <p:cNvPr id="26" name="Rectangle 25"/>
+          <p:cNvSpPr/>
+          <p:nvPr/>
+        </p:nvSpPr>
+        <p:spPr>
+          <a:xfrm>
+            <a:off x="731520" y="3749039"/>
+            <a:ext cx="3291840" cy="502920"/>
+          </a:xfrm>
+          <a:prstGeom prst="rect">
+            <a:avLst/>
+          </a:prstGeom>
+          <a:solidFill>
+            <a:srgbClr val="FFFFFF"/>
+          </a:solidFill>
+          <a:ln w="12700">
+            <a:solidFill>
+              <a:srgbClr val="D8DDE4"/>
+            </a:solidFill>
+          </a:ln>
+          <a:effectLst/>
+        </p:spPr>
+        <p:style>
+          <a:lnRef idx="1">
+            <a:schemeClr val="accent1"/>
+          </a:lnRef>
+          <a:fillRef idx="3">
+            <a:schemeClr val="accent1"/>
+          </a:fillRef>
+          <a:effectRef idx="2">
+            <a:schemeClr val="accent1"/>
+          </a:effectRef>
+          <a:fontRef idx="minor">
+            <a:schemeClr val="lt1"/>
+          </a:fontRef>
+        </p:style>
+        <p:txBody>
+          <a:bodyPr rtlCol="0" anchor="ctr"/>
+          <a:lstStyle/>
+          <a:p>
+            <a:pPr algn="ctr"/>
+          </a:p>
+        </p:txBody>
+      </p:sp>
+      <p:sp>
+        <p:nvSpPr>
+          <p:cNvPr id="27" name="TextBox 26"/>
+          <p:cNvSpPr txBox="1"/>
+          <p:nvPr/>
+        </p:nvSpPr>
+        <p:spPr>
+          <a:xfrm>
+            <a:off x="914400" y="3749039"/>
+            <a:ext cx="3017520" cy="502920"/>
+          </a:xfrm>
+          <a:prstGeom prst="rect">
+            <a:avLst/>
+          </a:prstGeom>
+          <a:noFill/>
+        </p:spPr>
+        <p:txBody>
+          <a:bodyPr wrap="square" anchor="ctr" lIns="0" rIns="0" tIns="0" bIns="0">
+            <a:spAutoFit/>
+          </a:bodyPr>
+          <a:lstStyle/>
+          <a:p>
+            <a:pPr algn="l">
+              <a:lnSpc>
+                <a:spcPct val="100000"/>
+              </a:lnSpc>
+            </a:pPr>
+            <a:r>
+              <a:rPr sz="1400" b="0">
+                <a:solidFill>
+                  <a:srgbClr val="171A1F"/>
+                </a:solidFill>
+                <a:latin typeface="Microsoft JhengHei"/>
+              </a:rPr>
+              <a:t>kNN (k=5)</a:t>
+            </a:r>
+          </a:p>
+        </p:txBody>
+      </p:sp>
+      <p:sp>
+        <p:nvSpPr>
+          <p:cNvPr id="28" name="Rectangle 27"/>
+          <p:cNvSpPr/>
+          <p:nvPr/>
+        </p:nvSpPr>
+        <p:spPr>
+          <a:xfrm>
+            <a:off x="4023360" y="3749039"/>
+            <a:ext cx="2468880" cy="502920"/>
+          </a:xfrm>
+          <a:prstGeom prst="rect">
+            <a:avLst/>
+          </a:prstGeom>
+          <a:solidFill>
+            <a:srgbClr val="FFFFFF"/>
+          </a:solidFill>
+          <a:ln w="12700">
+            <a:solidFill>
+              <a:srgbClr val="D8DDE4"/>
+            </a:solidFill>
+          </a:ln>
+          <a:effectLst/>
+        </p:spPr>
+        <p:style>
+          <a:lnRef idx="1">
+            <a:schemeClr val="accent1"/>
+          </a:lnRef>
+          <a:fillRef idx="3">
+            <a:schemeClr val="accent1"/>
+          </a:fillRef>
+          <a:effectRef idx="2">
+            <a:schemeClr val="accent1"/>
+          </a:effectRef>
+          <a:fontRef idx="minor">
+            <a:schemeClr val="lt1"/>
+          </a:fontRef>
+        </p:style>
+        <p:txBody>
+          <a:bodyPr rtlCol="0" anchor="ctr"/>
+          <a:lstStyle/>
+          <a:p>
+            <a:pPr algn="ctr"/>
+          </a:p>
+        </p:txBody>
+      </p:sp>
+      <p:sp>
+        <p:nvSpPr>
+          <p:cNvPr id="29" name="TextBox 28"/>
+          <p:cNvSpPr txBox="1"/>
+          <p:nvPr/>
+        </p:nvSpPr>
+        <p:spPr>
+          <a:xfrm>
+            <a:off x="4023360" y="3749039"/>
+            <a:ext cx="2468880" cy="502920"/>
+          </a:xfrm>
+          <a:prstGeom prst="rect">
+            <a:avLst/>
+          </a:prstGeom>
+          <a:noFill/>
+        </p:spPr>
+        <p:txBody>
+          <a:bodyPr wrap="square" anchor="ctr" lIns="0" rIns="0" tIns="0" bIns="0">
+            <a:spAutoFit/>
+          </a:bodyPr>
+          <a:lstStyle/>
+          <a:p>
+            <a:pPr algn="ctr">
+              <a:lnSpc>
+                <a:spcPct val="100000"/>
+              </a:lnSpc>
+            </a:pPr>
+            <a:r>
+              <a:rPr sz="1450" b="0">
+                <a:solidFill>
+                  <a:srgbClr val="5C636B"/>
+                </a:solidFill>
+                <a:latin typeface="Microsoft JhengHei"/>
+              </a:rPr>
+              <a:t>0.621</a:t>
+            </a:r>
+          </a:p>
+        </p:txBody>
+      </p:sp>
+      <p:sp>
+        <p:nvSpPr>
+          <p:cNvPr id="30" name="Rectangle 29"/>
+          <p:cNvSpPr/>
+          <p:nvPr/>
+        </p:nvSpPr>
+        <p:spPr>
+          <a:xfrm>
+            <a:off x="6492240" y="3749039"/>
+            <a:ext cx="2468880" cy="502920"/>
+          </a:xfrm>
+          <a:prstGeom prst="rect">
+            <a:avLst/>
+          </a:prstGeom>
+          <a:solidFill>
+            <a:srgbClr val="FFFFFF"/>
+          </a:solidFill>
+          <a:ln w="12700">
+            <a:solidFill>
+              <a:srgbClr val="D8DDE4"/>
+            </a:solidFill>
+          </a:ln>
+          <a:effectLst/>
+        </p:spPr>
+        <p:style>
+          <a:lnRef idx="1">
+            <a:schemeClr val="accent1"/>
+          </a:lnRef>
+          <a:fillRef idx="3">
+            <a:schemeClr val="accent1"/>
+          </a:fillRef>
+          <a:effectRef idx="2">
+            <a:schemeClr val="accent1"/>
+          </a:effectRef>
+          <a:fontRef idx="minor">
+            <a:schemeClr val="lt1"/>
+          </a:fontRef>
+        </p:style>
+        <p:txBody>
+          <a:bodyPr rtlCol="0" anchor="ctr"/>
+          <a:lstStyle/>
+          <a:p>
+            <a:pPr algn="ctr"/>
+          </a:p>
+        </p:txBody>
+      </p:sp>
+      <p:sp>
+        <p:nvSpPr>
+          <p:cNvPr id="31" name="TextBox 30"/>
+          <p:cNvSpPr txBox="1"/>
+          <p:nvPr/>
+        </p:nvSpPr>
+        <p:spPr>
+          <a:xfrm>
+            <a:off x="6492240" y="3749039"/>
+            <a:ext cx="2468880" cy="502920"/>
+          </a:xfrm>
+          <a:prstGeom prst="rect">
+            <a:avLst/>
+          </a:prstGeom>
+          <a:noFill/>
+        </p:spPr>
+        <p:txBody>
+          <a:bodyPr wrap="square" anchor="ctr" lIns="0" rIns="0" tIns="0" bIns="0">
+            <a:spAutoFit/>
+          </a:bodyPr>
+          <a:lstStyle/>
+          <a:p>
+            <a:pPr algn="ctr">
+              <a:lnSpc>
+                <a:spcPct val="100000"/>
+              </a:lnSpc>
+            </a:pPr>
+            <a:r>
+              <a:rPr sz="1450" b="1">
+                <a:solidFill>
+                  <a:srgbClr val="2C6B9C"/>
+                </a:solidFill>
+                <a:latin typeface="Microsoft JhengHei"/>
+              </a:rPr>
+              <a:t>0.657</a:t>
+            </a:r>
+          </a:p>
+        </p:txBody>
+      </p:sp>
+      <p:sp>
+        <p:nvSpPr>
+          <p:cNvPr id="32" name="Rectangle 31"/>
+          <p:cNvSpPr/>
+          <p:nvPr/>
+        </p:nvSpPr>
+        <p:spPr>
+          <a:xfrm>
+            <a:off x="8961120" y="3749039"/>
+            <a:ext cx="2560320" cy="502920"/>
+          </a:xfrm>
+          <a:prstGeom prst="rect">
+            <a:avLst/>
+          </a:prstGeom>
+          <a:solidFill>
+            <a:srgbClr val="FFFFFF"/>
+          </a:solidFill>
+          <a:ln w="12700">
+            <a:solidFill>
+              <a:srgbClr val="D8DDE4"/>
+            </a:solidFill>
+          </a:ln>
+          <a:effectLst/>
+        </p:spPr>
+        <p:style>
+          <a:lnRef idx="1">
+            <a:schemeClr val="accent1"/>
+          </a:lnRef>
+          <a:fillRef idx="3">
+            <a:schemeClr val="accent1"/>
+          </a:fillRef>
+          <a:effectRef idx="2">
+            <a:schemeClr val="accent1"/>
+          </a:effectRef>
+          <a:fontRef idx="minor">
+            <a:schemeClr val="lt1"/>
+          </a:fontRef>
+        </p:style>
+        <p:txBody>
+          <a:bodyPr rtlCol="0" anchor="ctr"/>
+          <a:lstStyle/>
+          <a:p>
+            <a:pPr algn="ctr"/>
+          </a:p>
+        </p:txBody>
+      </p:sp>
+      <p:sp>
+        <p:nvSpPr>
+          <p:cNvPr id="33" name="TextBox 32"/>
+          <p:cNvSpPr txBox="1"/>
+          <p:nvPr/>
+        </p:nvSpPr>
+        <p:spPr>
+          <a:xfrm>
+            <a:off x="8961120" y="3749039"/>
+            <a:ext cx="2560320" cy="502920"/>
+          </a:xfrm>
+          <a:prstGeom prst="rect">
+            <a:avLst/>
+          </a:prstGeom>
+          <a:noFill/>
+        </p:spPr>
+        <p:txBody>
+          <a:bodyPr wrap="square" anchor="ctr" lIns="0" rIns="0" tIns="0" bIns="0">
+            <a:spAutoFit/>
+          </a:bodyPr>
+          <a:lstStyle/>
+          <a:p>
+            <a:pPr algn="ctr">
+              <a:lnSpc>
+                <a:spcPct val="100000"/>
+              </a:lnSpc>
+            </a:pPr>
+            <a:r>
+              <a:rPr sz="1450" b="1">
+                <a:solidFill>
+                  <a:srgbClr val="2C7A68"/>
+                </a:solidFill>
+                <a:latin typeface="Microsoft JhengHei"/>
+              </a:rPr>
+              <a:t>+0.036</a:t>
+            </a:r>
+          </a:p>
+        </p:txBody>
+      </p:sp>
+      <p:sp>
+        <p:nvSpPr>
+          <p:cNvPr id="34" name="TextBox 33"/>
+          <p:cNvSpPr txBox="1"/>
+          <p:nvPr/>
+        </p:nvSpPr>
+        <p:spPr>
+          <a:xfrm>
+            <a:off x="731520" y="4297680"/>
+            <a:ext cx="10789920" cy="320040"/>
+          </a:xfrm>
+          <a:prstGeom prst="rect">
+            <a:avLst/>
+          </a:prstGeom>
+          <a:noFill/>
+        </p:spPr>
+        <p:txBody>
+          <a:bodyPr wrap="square" anchor="t" lIns="0" rIns="0" tIns="0" bIns="0">
+            <a:spAutoFit/>
+          </a:bodyPr>
+          <a:lstStyle/>
+          <a:p>
+            <a:pPr algn="l">
+              <a:lnSpc>
+                <a:spcPct val="100000"/>
+              </a:lnSpc>
+            </a:pPr>
+            <a:r>
+              <a:rPr sz="1100" b="0">
+                <a:solidFill>
+                  <a:srgbClr val="5C636B"/>
+                </a:solidFill>
+                <a:latin typeface="Microsoft JhengHei"/>
+              </a:rPr>
+              <a:t>口徑：灰階 train 248 房裁切、每類上限 40、9 類、TTA off；同前處理只換骨幹的公平對比。</a:t>
+            </a:r>
+          </a:p>
+        </p:txBody>
+      </p:sp>
+      <p:sp>
+        <p:nvSpPr>
+          <p:cNvPr id="35" name="Rounded Rectangle 34"/>
+          <p:cNvSpPr/>
+          <p:nvPr/>
+        </p:nvSpPr>
+        <p:spPr>
+          <a:xfrm>
+            <a:off x="731520" y="4526280"/>
+            <a:ext cx="5303520" cy="1600200"/>
+          </a:xfrm>
+          <a:prstGeom prst="roundRect">
+            <a:avLst/>
+          </a:prstGeom>
+          <a:solidFill>
+            <a:srgbClr val="FFFFFF"/>
+          </a:solidFill>
+          <a:ln w="12700">
+            <a:solidFill>
+              <a:srgbClr val="D8DDE4"/>
+            </a:solidFill>
+          </a:ln>
+          <a:effectLst/>
+        </p:spPr>
+        <p:style>
+          <a:lnRef idx="1">
+            <a:schemeClr val="accent1"/>
+          </a:lnRef>
+          <a:fillRef idx="3">
+            <a:schemeClr val="accent1"/>
+          </a:fillRef>
+          <a:effectRef idx="2">
+            <a:schemeClr val="accent1"/>
+          </a:effectRef>
+          <a:fontRef idx="minor">
+            <a:schemeClr val="lt1"/>
+          </a:fontRef>
+        </p:style>
+        <p:txBody>
+          <a:bodyPr rtlCol="0" anchor="ctr"/>
+          <a:lstStyle/>
+          <a:p>
+            <a:pPr algn="ctr"/>
+          </a:p>
+        </p:txBody>
+      </p:sp>
+      <p:sp>
+        <p:nvSpPr>
+          <p:cNvPr id="36" name="TextBox 35"/>
+          <p:cNvSpPr txBox="1"/>
+          <p:nvPr/>
+        </p:nvSpPr>
+        <p:spPr>
+          <a:xfrm>
+            <a:off x="960120" y="4690872"/>
+            <a:ext cx="4846320" cy="274320"/>
+          </a:xfrm>
+          <a:prstGeom prst="rect">
+            <a:avLst/>
+          </a:prstGeom>
+          <a:noFill/>
+        </p:spPr>
+        <p:txBody>
+          <a:bodyPr wrap="square" anchor="t" lIns="0" rIns="0" tIns="0" bIns="0">
+            <a:spAutoFit/>
+          </a:bodyPr>
+          <a:lstStyle/>
+          <a:p>
+            <a:pPr algn="l">
+              <a:lnSpc>
+                <a:spcPct val="100000"/>
+              </a:lnSpc>
+            </a:pPr>
+            <a:r>
+              <a:rPr sz="1250" b="1">
+                <a:solidFill>
+                  <a:srgbClr val="171A1F"/>
+                </a:solidFill>
+                <a:latin typeface="Microsoft JhengHei"/>
+              </a:rPr>
+              <a:t>逐類 recall 變化（DINOv2 → DINOv3）</a:t>
+            </a:r>
+          </a:p>
+        </p:txBody>
+      </p:sp>
+      <p:sp>
+        <p:nvSpPr>
+          <p:cNvPr id="37" name="TextBox 36"/>
+          <p:cNvSpPr txBox="1"/>
+          <p:nvPr/>
+        </p:nvSpPr>
+        <p:spPr>
+          <a:xfrm>
+            <a:off x="960120" y="5056632"/>
+            <a:ext cx="4937760" cy="1005840"/>
+          </a:xfrm>
+          <a:prstGeom prst="rect">
+            <a:avLst/>
+          </a:prstGeom>
+          <a:noFill/>
+        </p:spPr>
+        <p:txBody>
+          <a:bodyPr wrap="square" anchor="t" lIns="0" rIns="0" tIns="0" bIns="0">
+            <a:spAutoFit/>
+          </a:bodyPr>
+          <a:lstStyle/>
+          <a:p>
+            <a:pPr algn="l">
+              <a:lnSpc>
+                <a:spcPct val="115000"/>
+              </a:lnSpc>
+            </a:pPr>
+            <a:r>
+              <a:rPr sz="1200" b="1">
+                <a:solidFill>
+                  <a:srgbClr val="2C7A68"/>
+                </a:solidFill>
+                <a:latin typeface="Microsoft JhengHei"/>
+              </a:rPr>
+              <a:t>Storage +0.24</a:t>
+            </a:r>
+            <a:r>
+              <a:rPr sz="1200" b="0">
+                <a:solidFill>
+                  <a:srgbClr val="5C636B"/>
+                </a:solidFill>
+                <a:latin typeface="Microsoft JhengHei"/>
+              </a:rPr>
+              <a:t>（0.41→0.65，最大贏面）· Balcony +0.09 · Entry +0.08 · Hallway +0.05 · Kitchen +0.03 · Bath −0.03 · Bedroom/Stair 1.00 持平 · </a:t>
+            </a:r>
+            <a:r>
+              <a:rPr sz="1200" b="1">
+                <a:solidFill>
+                  <a:srgbClr val="B06A1F"/>
+                </a:solidFill>
+                <a:latin typeface="Microsoft JhengHei"/>
+              </a:rPr>
+              <a:t>LivingRoom 0.075 完全不變</a:t>
+            </a:r>
+            <a:r>
+              <a:rPr sz="1200" b="0">
+                <a:solidFill>
+                  <a:srgbClr val="5C636B"/>
+                </a:solidFill>
+                <a:latin typeface="Microsoft JhengHei"/>
+              </a:rPr>
+              <a:t>（開放式，屬幾何/資訊層，骨幹攻不到）</a:t>
+            </a:r>
+          </a:p>
+        </p:txBody>
+      </p:sp>
+      <p:sp>
+        <p:nvSpPr>
+          <p:cNvPr id="38" name="Rounded Rectangle 37"/>
+          <p:cNvSpPr/>
+          <p:nvPr/>
+        </p:nvSpPr>
+        <p:spPr>
+          <a:xfrm>
+            <a:off x="6400800" y="4526280"/>
+            <a:ext cx="5120640" cy="1600200"/>
+          </a:xfrm>
+          <a:prstGeom prst="roundRect">
+            <a:avLst/>
+          </a:prstGeom>
+          <a:solidFill>
+            <a:srgbClr val="FBF1E2"/>
+          </a:solidFill>
+          <a:ln w="12700">
+            <a:solidFill>
+              <a:srgbClr val="B06A1F"/>
+            </a:solidFill>
+          </a:ln>
+          <a:effectLst/>
+        </p:spPr>
+        <p:style>
+          <a:lnRef idx="1">
+            <a:schemeClr val="accent1"/>
+          </a:lnRef>
+          <a:fillRef idx="3">
+            <a:schemeClr val="accent1"/>
+          </a:fillRef>
+          <a:effectRef idx="2">
+            <a:schemeClr val="accent1"/>
+          </a:effectRef>
+          <a:fontRef idx="minor">
+            <a:schemeClr val="lt1"/>
+          </a:fontRef>
+        </p:style>
+        <p:txBody>
+          <a:bodyPr rtlCol="0" anchor="ctr"/>
+          <a:lstStyle/>
+          <a:p>
+            <a:pPr algn="ctr"/>
+          </a:p>
+        </p:txBody>
+      </p:sp>
+      <p:sp>
+        <p:nvSpPr>
+          <p:cNvPr id="39" name="TextBox 38"/>
+          <p:cNvSpPr txBox="1"/>
+          <p:nvPr/>
+        </p:nvSpPr>
+        <p:spPr>
+          <a:xfrm>
+            <a:off x="6629400" y="4690872"/>
+            <a:ext cx="2377440" cy="320040"/>
+          </a:xfrm>
+          <a:prstGeom prst="rect">
+            <a:avLst/>
+          </a:prstGeom>
+          <a:noFill/>
+        </p:spPr>
+        <p:txBody>
+          <a:bodyPr wrap="square" anchor="t" lIns="0" rIns="0" tIns="0" bIns="0">
+            <a:spAutoFit/>
+          </a:bodyPr>
+          <a:lstStyle/>
+          <a:p>
+            <a:pPr algn="l">
+              <a:lnSpc>
+                <a:spcPct val="100000"/>
+              </a:lnSpc>
+            </a:pPr>
+            <a:r>
+              <a:rPr sz="1250" b="1">
+                <a:solidFill>
+                  <a:srgbClr val="B06A1F"/>
+                </a:solidFill>
+                <a:latin typeface="Microsoft JhengHei"/>
+              </a:rPr>
+              <a:t>判讀 · 落點偏情境 B</a:t>
+            </a:r>
+          </a:p>
+        </p:txBody>
+      </p:sp>
+      <p:sp>
+        <p:nvSpPr>
+          <p:cNvPr id="40" name="TextBox 39"/>
+          <p:cNvSpPr txBox="1"/>
+          <p:nvPr/>
+        </p:nvSpPr>
+        <p:spPr>
+          <a:xfrm>
+            <a:off x="6629400" y="5056632"/>
+            <a:ext cx="4663440" cy="1005840"/>
+          </a:xfrm>
+          <a:prstGeom prst="rect">
+            <a:avLst/>
+          </a:prstGeom>
+          <a:noFill/>
+        </p:spPr>
+        <p:txBody>
+          <a:bodyPr wrap="square" anchor="t" lIns="0" rIns="0" tIns="0" bIns="0">
+            <a:spAutoFit/>
+          </a:bodyPr>
+          <a:lstStyle/>
+          <a:p>
+            <a:pPr algn="l">
+              <a:lnSpc>
+                <a:spcPct val="115000"/>
+              </a:lnSpc>
+            </a:pPr>
+            <a:r>
+              <a:rPr sz="1200" b="0">
+                <a:solidFill>
+                  <a:srgbClr val="171A1F"/>
+                </a:solidFill>
+                <a:latin typeface="Microsoft JhengHei"/>
+              </a:rPr>
+              <a:t>小幅但一致的正向（NC/kNN 各約 +0.036，相對 ~6%），非量級躍升。此為原始特徵可分性上限、非端到端辨識率。建議下一步「裝線性頭實測 top-1」再拍板，勿只憑可分性；授權關卡仍在（Meta 自訂授權須法務）。</a:t>
+            </a:r>
+          </a:p>
+        </p:txBody>
+      </p:sp>
+      <p:sp>
+        <p:nvSpPr>
+          <p:cNvPr id="41" name="TextBox 40"/>
+          <p:cNvSpPr txBox="1"/>
+          <p:nvPr/>
+        </p:nvSpPr>
+        <p:spPr>
+          <a:xfrm>
+            <a:off x="731520" y="6355080"/>
+            <a:ext cx="10789920" cy="320040"/>
+          </a:xfrm>
+          <a:prstGeom prst="rect">
+            <a:avLst/>
+          </a:prstGeom>
+          <a:noFill/>
+        </p:spPr>
+        <p:txBody>
+          <a:bodyPr wrap="square" anchor="t" lIns="0" rIns="0" tIns="0" bIns="0">
+            <a:spAutoFit/>
+          </a:bodyPr>
+          <a:lstStyle/>
+          <a:p>
+            <a:pPr algn="l">
+              <a:lnSpc>
+                <a:spcPct val="100000"/>
+              </a:lnSpc>
+            </a:pPr>
+            <a:r>
+              <a:rPr sz="950" b="0">
+                <a:solidFill>
+                  <a:srgbClr val="5C636B"/>
+                </a:solidFill>
+                <a:latin typeface="Microsoft JhengHei"/>
+              </a:rPr>
+              <a:t>來源  temp/json/dino_probe_facebook_dinov3-vits16-pretrain-lvd1689m.json ／ dino_probe_dinov2_vits14.json · training/scripts/probe_dino_backbone.py</a:t>
             </a:r>
           </a:p>
         </p:txBody>
